--- a/benchmarks/osworld/results/agent_computer_sonnet5/a434992a-89df-4577-925c-0c58b747f0f4/run_2/16_2.pptx
+++ b/benchmarks/osworld/results/agent_computer_sonnet5/a434992a-89df-4577-925c-0c58b747f0f4/run_2/16_2.pptx
@@ -63,7 +63,7 @@
         <p:txBody>
           <a:bodyPr/>
           <a:p>
-            <a:fld id="{B633E5DC-0C70-4F23-BC20-3DCC66525E1D}" type="slidenum">
+            <a:fld id="{153EA5B0-E992-4D04-8336-1442335CB355}" type="slidenum">
               <a:t>&lt;#&gt;</a:t>
             </a:fld>
           </a:p>
@@ -251,7 +251,7 @@
         <p:txBody>
           <a:bodyPr/>
           <a:p>
-            <a:fld id="{6BA0B898-68C1-4D67-A37B-AB1F3665220D}" type="slidenum">
+            <a:fld id="{CFBE8B81-11AC-4124-AB6E-EE2254D42BDF}" type="slidenum">
               <a:t>&lt;#&gt;</a:t>
             </a:fld>
           </a:p>
@@ -507,7 +507,7 @@
         <p:txBody>
           <a:bodyPr/>
           <a:p>
-            <a:fld id="{D4FFC4C0-7713-44CC-8343-6A75E692BB50}" type="slidenum">
+            <a:fld id="{517382A6-E9A9-4A06-99D2-E6A287A393BD}" type="slidenum">
               <a:t>&lt;#&gt;</a:t>
             </a:fld>
           </a:p>
@@ -831,7 +831,7 @@
         <p:txBody>
           <a:bodyPr/>
           <a:p>
-            <a:fld id="{57EF36CA-60CA-48E0-87DC-2246C04D0FF9}" type="slidenum">
+            <a:fld id="{E4DC33F7-CBA1-4EEC-BBAE-7B070DBE8634}" type="slidenum">
               <a:t>&lt;#&gt;</a:t>
             </a:fld>
           </a:p>
@@ -988,7 +988,7 @@
         <p:txBody>
           <a:bodyPr/>
           <a:p>
-            <a:fld id="{64A5EB7F-8349-43DA-AC10-0AD8BFE88678}" type="slidenum">
+            <a:fld id="{9A87F543-BC1F-4F8A-A173-F56EBDBDFC88}" type="slidenum">
               <a:t>&lt;#&gt;</a:t>
             </a:fld>
           </a:p>
@@ -1142,7 +1142,7 @@
         <p:txBody>
           <a:bodyPr/>
           <a:p>
-            <a:fld id="{6D3CE8F7-7FD4-415A-8C1E-718A9999EB24}" type="slidenum">
+            <a:fld id="{BE500100-4476-406D-B702-7ECF9EE3C8EE}" type="slidenum">
               <a:t>&lt;#&gt;</a:t>
             </a:fld>
           </a:p>
@@ -1330,7 +1330,7 @@
         <p:txBody>
           <a:bodyPr/>
           <a:p>
-            <a:fld id="{F8DED9C9-3D5E-4312-B98F-53794DEEFAD3}" type="slidenum">
+            <a:fld id="{54A2FD12-6C19-4E98-BF08-57AC99DA1FF1}" type="slidenum">
               <a:t>&lt;#&gt;</a:t>
             </a:fld>
           </a:p>
@@ -1450,7 +1450,7 @@
         <p:txBody>
           <a:bodyPr/>
           <a:p>
-            <a:fld id="{6A47104A-314D-4041-8BD6-B7CA7683D57F}" type="slidenum">
+            <a:fld id="{5BE68EB3-DE4B-49FA-A278-576061C852BC}" type="slidenum">
               <a:t>&lt;#&gt;</a:t>
             </a:fld>
           </a:p>
@@ -1570,7 +1570,7 @@
         <p:txBody>
           <a:bodyPr/>
           <a:p>
-            <a:fld id="{71EB230D-BDDD-4BFA-AF3E-1AC8B1288FC3}" type="slidenum">
+            <a:fld id="{399E137B-B67F-4688-8B59-F67C66E56352}" type="slidenum">
               <a:t>&lt;#&gt;</a:t>
             </a:fld>
           </a:p>
@@ -1792,7 +1792,7 @@
         <p:txBody>
           <a:bodyPr/>
           <a:p>
-            <a:fld id="{4F27BD66-37BC-4015-94BF-0EF8AF021A38}" type="slidenum">
+            <a:fld id="{13DA7C7A-ADE9-4F51-AC21-19D376A68A23}" type="slidenum">
               <a:t>&lt;#&gt;</a:t>
             </a:fld>
           </a:p>
@@ -2014,7 +2014,7 @@
         <p:txBody>
           <a:bodyPr/>
           <a:p>
-            <a:fld id="{AAD087B9-18C2-48B8-B4DE-F15E9D8DB1C3}" type="slidenum">
+            <a:fld id="{609BCE27-66A7-43E9-BEC7-AC6C657CD470}" type="slidenum">
               <a:t>&lt;#&gt;</a:t>
             </a:fld>
           </a:p>
@@ -2236,7 +2236,7 @@
         <p:txBody>
           <a:bodyPr/>
           <a:p>
-            <a:fld id="{A7CF9DAD-F043-4068-941F-A4940C1EF606}" type="slidenum">
+            <a:fld id="{BCC624A4-9409-4274-B02C-2517FAEE5C62}" type="slidenum">
               <a:t>&lt;#&gt;</a:t>
             </a:fld>
           </a:p>
@@ -2397,7 +2397,7 @@
               </a:lnSpc>
               <a:buNone/>
             </a:pPr>
-            <a:fld id="{45448545-B901-46FF-BDFD-058DBD443A45}" type="slidenum">
+            <a:fld id="{518890A8-623B-43C4-ACA9-5F3A79C7DAB4}" type="slidenum">
               <a:rPr b="0" lang="en-US" sz="1200" spc="-1" strike="noStrike">
                 <a:solidFill>
                   <a:srgbClr val="8b8b8b"/>
